--- a/library/a06-figma-nocode/a06-figma-nocode.pptx
+++ b/library/a06-figma-nocode/a06-figma-nocode.pptx
@@ -1840,79 +1840,6 @@
       </p:sp>
       <p:pic>
         <p:nvPicPr>
-          <p:cNvPr id="14" name="Image 0" descr="preencoded.png"/>
-          <p:cNvPicPr>
-            <a:picLocks noChangeAspect="1"/>
-          </p:cNvPicPr>
-          <p:nvPr/>
-        </p:nvPicPr>
-        <p:blipFill>
-          <a:blip r:embed="rId3"/>
-          <a:srcRect l="-30128" r="-30128"/>
-          <a:stretch/>
-        </p:blipFill>
-        <p:spPr>
-          <a:xfrm>
-            <a:off x="1237237" y="5148145"/>
-            <a:ext cx="320921" cy="200254"/>
-          </a:xfrm>
-          <a:prstGeom prst="rect">
-            <a:avLst/>
-          </a:prstGeom>
-        </p:spPr>
-      </p:pic>
-      <p:sp>
-        <p:nvSpPr>
-          <p:cNvPr id="15" name="Text 12"/>
-          <p:cNvSpPr txBox="1"/>
-          <p:nvPr/>
-        </p:nvSpPr>
-        <p:spPr>
-          <a:xfrm>
-            <a:off x="1578749" y="5178592"/>
-            <a:ext cx="2845613" cy="200254"/>
-          </a:xfrm>
-          <a:prstGeom prst="rect">
-            <a:avLst/>
-          </a:prstGeom>
-          <a:noFill/>
-          <a:ln/>
-        </p:spPr>
-        <p:txBody>
-          <a:bodyPr wrap="square" lIns="0" tIns="0" rIns="0" bIns="0" rtlCol="0" anchor="ctr"/>
-          <a:lstStyle/>
-          <a:p>
-            <a:pPr marL="0" indent="0" algn="l">
-              <a:buNone/>
-            </a:pPr>
-            <a:r>
-              <a:rPr lang="en-US" sz="1100" b="1" dirty="0" err="1">
-                <a:solidFill>
-                  <a:srgbClr val="333333"/>
-                </a:solidFill>
-                <a:latin typeface="Noto Sans KR" pitchFamily="34" charset="0"/>
-                <a:ea typeface="Noto Sans KR" pitchFamily="34" charset="-122"/>
-                <a:cs typeface="Noto Sans KR" pitchFamily="34" charset="-120"/>
-              </a:rPr>
-              <a:t>진행</a:t>
-            </a:r>
-            <a:r>
-              <a:rPr lang="en-US" sz="1100" b="1" dirty="0">
-                <a:solidFill>
-                  <a:srgbClr val="333333"/>
-                </a:solidFill>
-                <a:latin typeface="Noto Sans KR" pitchFamily="34" charset="0"/>
-                <a:ea typeface="Noto Sans KR" pitchFamily="34" charset="-122"/>
-                <a:cs typeface="Noto Sans KR" pitchFamily="34" charset="-120"/>
-              </a:rPr>
-              <a:t> : 이론 30분 + 실습 25분 + Q&amp;A 5분</a:t>
-            </a:r>
-            <a:endParaRPr lang="en-US" sz="1100" b="1" dirty="0"/>
-          </a:p>
-        </p:txBody>
-      </p:sp>
-      <p:pic>
-        <p:nvPicPr>
           <p:cNvPr id="16" name="Image 1" descr="preencoded.png"/>
           <p:cNvPicPr>
             <a:picLocks noChangeAspect="1"/>
@@ -2229,7 +2156,7 @@
                   <a:ea typeface="Noto Sans KR" pitchFamily="34" charset="-122"/>
                   <a:cs typeface="Noto Sans KR" pitchFamily="34" charset="-120"/>
                 </a:rPr>
-                <a:t>이 애 본 </a:t>
+                <a:t>이애본</a:t>
               </a:r>
               <a:r>
                 <a:rPr lang="ko-KR" altLang="en-US" sz="1300" dirty="0">
@@ -2240,8 +2167,18 @@
                   <a:ea typeface="Noto Sans KR" pitchFamily="34" charset="-122"/>
                   <a:cs typeface="Noto Sans KR" pitchFamily="34" charset="-120"/>
                 </a:rPr>
-                <a:t> </a:t>
+                <a:t/>
               </a:r>
+              <a:br>
+                <a:rPr lang="en-US" altLang="ko-KR" sz="1300" dirty="0">
+                  <a:solidFill>
+                    <a:srgbClr val="000000"/>
+                  </a:solidFill>
+                  <a:latin typeface="Noto Sans KR" pitchFamily="34" charset="0"/>
+                  <a:ea typeface="Noto Sans KR" pitchFamily="34" charset="-122"/>
+                  <a:cs typeface="Noto Sans KR" pitchFamily="34" charset="-120"/>
+                </a:rPr>
+              </a:br>
               <a:r>
                 <a:rPr lang="en-US" altLang="ko-KR" sz="1300" dirty="0">
                   <a:solidFill>
@@ -2263,7 +2200,7 @@
                   <a:cs typeface="Noto Sans KR" pitchFamily="34" charset="-120"/>
                   <a:hlinkClick r:id="rId7"/>
                 </a:rPr>
-                <a:t>aebon@hs.ac.kr</a:t>
+                <a:t>aebon@dreamitbiz.com</a:t>
               </a:r>
               <a:r>
                 <a:rPr lang="en-US" altLang="ko-KR" sz="1300" dirty="0">
@@ -2290,7 +2227,7 @@
                   <a:ea typeface="Noto Sans KR" pitchFamily="34" charset="-122"/>
                   <a:cs typeface="Noto Sans KR" pitchFamily="34" charset="-120"/>
                 </a:rPr>
-                <a:t>한신대학교 </a:t>
+                <a:t>드림아이티비즈(DreamIT Biz)</a:t>
               </a:r>
               <a:r>
                 <a:rPr lang="en-US" altLang="ko-KR" sz="1400" dirty="0">
@@ -2301,7 +2238,7 @@
                   <a:ea typeface="Noto Sans KR" pitchFamily="34" charset="-122"/>
                   <a:cs typeface="Noto Sans KR" pitchFamily="34" charset="-120"/>
                 </a:rPr>
-                <a:t>AI.SW</a:t>
+                <a:t/>
               </a:r>
               <a:r>
                 <a:rPr lang="ko-KR" altLang="en-US" sz="1400" dirty="0">
@@ -2312,7 +2249,7 @@
                   <a:ea typeface="Noto Sans KR" pitchFamily="34" charset="-122"/>
                   <a:cs typeface="Noto Sans KR" pitchFamily="34" charset="-120"/>
                 </a:rPr>
-                <a:t>대학</a:t>
+                <a:t/>
               </a:r>
               <a:r>
                 <a:rPr lang="ko-KR" altLang="en-US" sz="1300" dirty="0">
@@ -2364,7 +2301,7 @@
                 </a:solidFill>
                 <a:latin typeface="Pretendard"/>
               </a:rPr>
-              <a:t>© 2026 이애본(드림아이티비즈) · useful-ai.dreamitbiz.com · 교육 목적 비영리 이용 · 출처 표기</a:t>
+              <a:t>© 2026 이애본 · 홍문원(洪文院) 발행 · CC BY-NC-ND 4.0 · useful-ai.dreamitbiz.com</a:t>
             </a:r>
           </a:p>
         </p:txBody>
@@ -2665,281 +2602,6 @@
           </a:prstGeom>
         </p:spPr>
       </p:pic>
-      <p:sp>
-        <p:nvSpPr>
-          <p:cNvPr id="31" name="Text 47">
-            <a:extLst>
-              <a:ext uri="{FF2B5EF4-FFF2-40B4-BE49-F238E27FC236}">
-                <a16:creationId xmlns:a16="http://schemas.microsoft.com/office/drawing/2014/main" id="{D6FD39A4-C619-6604-934A-012AACD4BD21}"/>
-              </a:ext>
-            </a:extLst>
-          </p:cNvPr>
-          <p:cNvSpPr txBox="1"/>
-          <p:nvPr/>
-        </p:nvSpPr>
-        <p:spPr>
-          <a:xfrm>
-            <a:off x="7643390" y="3017435"/>
-            <a:ext cx="3706063" cy="495605"/>
-          </a:xfrm>
-          <a:prstGeom prst="rect">
-            <a:avLst/>
-          </a:prstGeom>
-          <a:noFill/>
-          <a:ln/>
-        </p:spPr>
-        <p:txBody>
-          <a:bodyPr wrap="square" lIns="0" tIns="0" rIns="0" bIns="0" rtlCol="0" anchor="t"/>
-          <a:lstStyle/>
-          <a:p>
-            <a:pPr marL="0" indent="0" algn="l">
-              <a:buNone/>
-            </a:pPr>
-            <a:r>
-              <a:rPr lang="en-US" sz="1200" dirty="0">
-                <a:solidFill>
-                  <a:srgbClr val="D1D5DB"/>
-                </a:solidFill>
-                <a:latin typeface="Noto Sans KR" pitchFamily="34" charset="0"/>
-                <a:ea typeface="Noto Sans KR" pitchFamily="34" charset="-122"/>
-                <a:cs typeface="Noto Sans KR" pitchFamily="34" charset="-120"/>
-              </a:rPr>
-              <a:t>콘텐츠 제작 과정이나 저작권 이슈에 </a:t>
-            </a:r>
-            <a:r>
-              <a:rPr lang="en-US" sz="1200" dirty="0" err="1">
-                <a:solidFill>
-                  <a:srgbClr val="D1D5DB"/>
-                </a:solidFill>
-                <a:latin typeface="Noto Sans KR" pitchFamily="34" charset="0"/>
-                <a:ea typeface="Noto Sans KR" pitchFamily="34" charset="-122"/>
-                <a:cs typeface="Noto Sans KR" pitchFamily="34" charset="-120"/>
-              </a:rPr>
-              <a:t>대해</a:t>
-            </a:r>
-            <a:r>
-              <a:rPr lang="en-US" sz="1200" dirty="0">
-                <a:solidFill>
-                  <a:srgbClr val="D1D5DB"/>
-                </a:solidFill>
-                <a:latin typeface="Noto Sans KR" pitchFamily="34" charset="0"/>
-                <a:ea typeface="Noto Sans KR" pitchFamily="34" charset="-122"/>
-                <a:cs typeface="Noto Sans KR" pitchFamily="34" charset="-120"/>
-              </a:rPr>
-              <a:t> </a:t>
-            </a:r>
-          </a:p>
-          <a:p>
-            <a:pPr marL="0" indent="0" algn="l">
-              <a:buNone/>
-            </a:pPr>
-            <a:r>
-              <a:rPr lang="en-US" sz="1200" dirty="0" err="1">
-                <a:solidFill>
-                  <a:srgbClr val="D1D5DB"/>
-                </a:solidFill>
-                <a:latin typeface="Noto Sans KR" pitchFamily="34" charset="0"/>
-                <a:ea typeface="Noto Sans KR" pitchFamily="34" charset="-122"/>
-                <a:cs typeface="Noto Sans KR" pitchFamily="34" charset="-120"/>
-              </a:rPr>
-              <a:t>궁금한</a:t>
-            </a:r>
-            <a:r>
-              <a:rPr lang="en-US" sz="1200" dirty="0">
-                <a:solidFill>
-                  <a:srgbClr val="D1D5DB"/>
-                </a:solidFill>
-                <a:latin typeface="Noto Sans KR" pitchFamily="34" charset="0"/>
-                <a:ea typeface="Noto Sans KR" pitchFamily="34" charset="-122"/>
-                <a:cs typeface="Noto Sans KR" pitchFamily="34" charset="-120"/>
-              </a:rPr>
-              <a:t> 점이 있다면 자유롭게 질문해주세요.</a:t>
-            </a:r>
-            <a:endParaRPr lang="en-US" sz="1200" dirty="0"/>
-          </a:p>
-        </p:txBody>
-      </p:sp>
-      <p:sp>
-        <p:nvSpPr>
-          <p:cNvPr id="32" name="Text 48">
-            <a:extLst>
-              <a:ext uri="{FF2B5EF4-FFF2-40B4-BE49-F238E27FC236}">
-                <a16:creationId xmlns:a16="http://schemas.microsoft.com/office/drawing/2014/main" id="{D8E8C650-C3ED-9726-DBE8-D06BE9D1CF00}"/>
-              </a:ext>
-            </a:extLst>
-          </p:cNvPr>
-          <p:cNvSpPr txBox="1"/>
-          <p:nvPr/>
-        </p:nvSpPr>
-        <p:spPr>
-          <a:xfrm>
-            <a:off x="7643390" y="2062801"/>
-            <a:ext cx="724205" cy="467258"/>
-          </a:xfrm>
-          <a:prstGeom prst="rect">
-            <a:avLst/>
-          </a:prstGeom>
-          <a:noFill/>
-          <a:ln/>
-        </p:spPr>
-        <p:txBody>
-          <a:bodyPr wrap="square" lIns="0" tIns="0" rIns="0" bIns="0" rtlCol="0" anchor="ctr"/>
-          <a:lstStyle/>
-          <a:p>
-            <a:pPr marL="0" indent="0" algn="l">
-              <a:buNone/>
-            </a:pPr>
-            <a:r>
-              <a:rPr lang="en-US" sz="2700" b="1" dirty="0">
-                <a:solidFill>
-                  <a:srgbClr val="FFFFFF"/>
-                </a:solidFill>
-                <a:latin typeface="Manrope" pitchFamily="34" charset="0"/>
-                <a:ea typeface="Manrope" pitchFamily="34" charset="-122"/>
-                <a:cs typeface="Manrope" pitchFamily="34" charset="-120"/>
-              </a:rPr>
-              <a:t>Any</a:t>
-            </a:r>
-            <a:endParaRPr lang="en-US" sz="2700" dirty="0"/>
-          </a:p>
-        </p:txBody>
-      </p:sp>
-      <p:sp>
-        <p:nvSpPr>
-          <p:cNvPr id="33" name="Text 49">
-            <a:extLst>
-              <a:ext uri="{FF2B5EF4-FFF2-40B4-BE49-F238E27FC236}">
-                <a16:creationId xmlns:a16="http://schemas.microsoft.com/office/drawing/2014/main" id="{B4B278C6-F3D4-80BF-8C23-306A085D2ED3}"/>
-              </a:ext>
-            </a:extLst>
-          </p:cNvPr>
-          <p:cNvSpPr txBox="1"/>
-          <p:nvPr/>
-        </p:nvSpPr>
-        <p:spPr>
-          <a:xfrm>
-            <a:off x="7643390" y="2440448"/>
-            <a:ext cx="2281428" cy="467258"/>
-          </a:xfrm>
-          <a:prstGeom prst="rect">
-            <a:avLst/>
-          </a:prstGeom>
-          <a:noFill/>
-          <a:ln/>
-        </p:spPr>
-        <p:txBody>
-          <a:bodyPr wrap="square" lIns="0" tIns="0" rIns="0" bIns="0" rtlCol="0" anchor="ctr"/>
-          <a:lstStyle/>
-          <a:p>
-            <a:pPr marL="0" indent="0" algn="l">
-              <a:buNone/>
-            </a:pPr>
-            <a:r>
-              <a:rPr lang="en-US" sz="2700" b="1" dirty="0">
-                <a:solidFill>
-                  <a:srgbClr val="FFFFFF"/>
-                </a:solidFill>
-                <a:latin typeface="Manrope" pitchFamily="34" charset="0"/>
-                <a:ea typeface="Manrope" pitchFamily="34" charset="-122"/>
-                <a:cs typeface="Manrope" pitchFamily="34" charset="-120"/>
-              </a:rPr>
-              <a:t>Questions?</a:t>
-            </a:r>
-            <a:endParaRPr lang="en-US" sz="2700" dirty="0"/>
-          </a:p>
-        </p:txBody>
-      </p:sp>
-      <p:sp>
-        <p:nvSpPr>
-          <p:cNvPr id="34" name="Shape 32">
-            <a:extLst>
-              <a:ext uri="{FF2B5EF4-FFF2-40B4-BE49-F238E27FC236}">
-                <a16:creationId xmlns:a16="http://schemas.microsoft.com/office/drawing/2014/main" id="{63128E28-3176-3E42-086D-367A1527DFD4}"/>
-              </a:ext>
-            </a:extLst>
-          </p:cNvPr>
-          <p:cNvSpPr/>
-          <p:nvPr/>
-        </p:nvSpPr>
-        <p:spPr>
-          <a:xfrm>
-            <a:off x="7671039" y="3763127"/>
-            <a:ext cx="3605262" cy="523951"/>
-          </a:xfrm>
-          <a:prstGeom prst="roundRect">
-            <a:avLst>
-              <a:gd name="adj" fmla="val 158655"/>
-            </a:avLst>
-          </a:prstGeom>
-          <a:solidFill>
-            <a:srgbClr val="FF6908"/>
-          </a:solidFill>
-          <a:ln w="12700">
-            <a:solidFill>
-              <a:srgbClr val="FFFFFF">
-                <a:alpha val="0"/>
-              </a:srgbClr>
-            </a:solidFill>
-            <a:prstDash val="solid"/>
-          </a:ln>
-          <a:effectLst>
-            <a:outerShdw blurRad="114300" dist="38100" dir="16200000" algn="bl" rotWithShape="0">
-              <a:srgbClr val="FF6908">
-                <a:alpha val="30000"/>
-              </a:srgbClr>
-            </a:outerShdw>
-          </a:effectLst>
-        </p:spPr>
-        <p:txBody>
-          <a:bodyPr/>
-          <a:lstStyle/>
-          <a:p>
-            <a:endParaRPr lang="ko-KR" altLang="en-US"/>
-          </a:p>
-        </p:txBody>
-      </p:sp>
-      <p:sp>
-        <p:nvSpPr>
-          <p:cNvPr id="35" name="Text 33">
-            <a:extLst>
-              <a:ext uri="{FF2B5EF4-FFF2-40B4-BE49-F238E27FC236}">
-                <a16:creationId xmlns:a16="http://schemas.microsoft.com/office/drawing/2014/main" id="{E6C99115-EAAE-A20D-CC7F-2C06195CB3BB}"/>
-              </a:ext>
-            </a:extLst>
-          </p:cNvPr>
-          <p:cNvSpPr txBox="1"/>
-          <p:nvPr/>
-        </p:nvSpPr>
-        <p:spPr>
-          <a:xfrm>
-            <a:off x="7815120" y="3876969"/>
-            <a:ext cx="3829079" cy="280721"/>
-          </a:xfrm>
-          <a:prstGeom prst="rect">
-            <a:avLst/>
-          </a:prstGeom>
-          <a:noFill/>
-          <a:ln/>
-        </p:spPr>
-        <p:txBody>
-          <a:bodyPr wrap="square" lIns="0" tIns="0" rIns="0" bIns="0" rtlCol="0" anchor="ctr"/>
-          <a:lstStyle/>
-          <a:p>
-            <a:r>
-              <a:rPr lang="en-US" sz="1600" b="1" dirty="0">
-                <a:solidFill>
-                  <a:srgbClr val="FFFFFF"/>
-                </a:solidFill>
-                <a:latin typeface="Pretendard" pitchFamily="34" charset="0"/>
-                <a:ea typeface="Pretendard" pitchFamily="34" charset="-122"/>
-                <a:cs typeface="Pretendard" pitchFamily="34" charset="-120"/>
-              </a:rPr>
-              <a:t>https://padlet.com/aebon/contents26</a:t>
-            </a:r>
-            <a:endParaRPr lang="en-US" sz="1600" dirty="0"/>
-          </a:p>
-        </p:txBody>
-      </p:sp>
       <p:grpSp>
         <p:nvGrpSpPr>
           <p:cNvPr id="36" name="그룹 35">
@@ -3095,7 +2757,7 @@
                   <a:ea typeface="Noto Sans KR" pitchFamily="34" charset="-122"/>
                   <a:cs typeface="Noto Sans KR" pitchFamily="34" charset="-120"/>
                 </a:rPr>
-                <a:t>이 애 본 </a:t>
+                <a:t>이애본</a:t>
               </a:r>
               <a:r>
                 <a:rPr lang="ko-KR" altLang="en-US" sz="1300" dirty="0">
@@ -3106,8 +2768,18 @@
                   <a:ea typeface="Noto Sans KR" pitchFamily="34" charset="-122"/>
                   <a:cs typeface="Noto Sans KR" pitchFamily="34" charset="-120"/>
                 </a:rPr>
-                <a:t> </a:t>
+                <a:t/>
               </a:r>
+              <a:br>
+                <a:rPr lang="en-US" altLang="ko-KR" sz="1300" dirty="0">
+                  <a:solidFill>
+                    <a:schemeClr val="bg1"/>
+                  </a:solidFill>
+                  <a:latin typeface="Noto Sans KR" pitchFamily="34" charset="0"/>
+                  <a:ea typeface="Noto Sans KR" pitchFamily="34" charset="-122"/>
+                  <a:cs typeface="Noto Sans KR" pitchFamily="34" charset="-120"/>
+                </a:rPr>
+              </a:br>
               <a:r>
                 <a:rPr lang="en-US" altLang="ko-KR" sz="1300" dirty="0">
                   <a:solidFill>
@@ -3117,7 +2789,7 @@
                   <a:ea typeface="Noto Sans KR" pitchFamily="34" charset="-122"/>
                   <a:cs typeface="Noto Sans KR" pitchFamily="34" charset="-120"/>
                 </a:rPr>
-                <a:t>(aebon@hs.ac.kr)</a:t>
+                <a:t>(aebon@dreamitbiz.com)</a:t>
               </a:r>
             </a:p>
             <a:p>
@@ -3133,7 +2805,7 @@
                   <a:ea typeface="Noto Sans KR" pitchFamily="34" charset="-122"/>
                   <a:cs typeface="Noto Sans KR" pitchFamily="34" charset="-120"/>
                 </a:rPr>
-                <a:t>한신대학교 </a:t>
+                <a:t>드림아이티비즈(DreamIT Biz)</a:t>
               </a:r>
               <a:r>
                 <a:rPr lang="en-US" altLang="ko-KR" sz="1400" dirty="0">
@@ -3144,7 +2816,7 @@
                   <a:ea typeface="Noto Sans KR" pitchFamily="34" charset="-122"/>
                   <a:cs typeface="Noto Sans KR" pitchFamily="34" charset="-120"/>
                 </a:rPr>
-                <a:t>AI.SW</a:t>
+                <a:t/>
               </a:r>
               <a:r>
                 <a:rPr lang="ko-KR" altLang="en-US" sz="1400" dirty="0">
@@ -3155,7 +2827,7 @@
                   <a:ea typeface="Noto Sans KR" pitchFamily="34" charset="-122"/>
                   <a:cs typeface="Noto Sans KR" pitchFamily="34" charset="-120"/>
                 </a:rPr>
-                <a:t>대학</a:t>
+                <a:t/>
               </a:r>
               <a:r>
                 <a:rPr lang="ko-KR" altLang="en-US" sz="1300" dirty="0">
@@ -3179,7 +2851,56 @@
       </p:grpSp>
       <p:sp>
         <p:nvSpPr>
-          <p:cNvPr id="40" name="deckgen:wrap:footer"/>
+          <p:cNvPr id="40" name="S3 이어서 보기"/>
+          <p:cNvSpPr txBox="1"/>
+          <p:nvPr/>
+        </p:nvSpPr>
+        <p:spPr>
+          <a:xfrm>
+            <a:off x="7650000" y="2000000"/>
+            <a:ext cx="3900000" cy="750000"/>
+          </a:xfrm>
+          <a:prstGeom prst="rect">
+            <a:avLst/>
+          </a:prstGeom>
+          <a:noFill/>
+        </p:spPr>
+        <p:txBody>
+          <a:bodyPr wrap="square" lIns="0" tIns="0" rIns="0" bIns="0" anchor="t">
+            <a:spAutoFit/>
+          </a:bodyPr>
+          <a:lstStyle/>
+          <a:p>
+            <a:r>
+              <a:rPr lang="ko-KR" sz="1400" b="1" dirty="0">
+                <a:solidFill>
+                  <a:srgbClr val="FFFFFF"/>
+                </a:solidFill>
+                <a:latin typeface="Noto Sans KR"/>
+                <a:ea typeface="Noto Sans KR"/>
+                <a:cs typeface="Noto Sans KR"/>
+              </a:rPr>
+              <a:t>이어서 보기</a:t>
+            </a:r>
+          </a:p>
+          <a:p>
+            <a:r>
+              <a:rPr lang="ko-KR" sz="1400" dirty="0">
+                <a:solidFill>
+                  <a:srgbClr val="FFFFFF"/>
+                </a:solidFill>
+                <a:latin typeface="Noto Sans KR"/>
+                <a:ea typeface="Noto Sans KR"/>
+                <a:cs typeface="Noto Sans KR"/>
+              </a:rPr>
+              <a:t>A07 바이브코딩 포트폴리오 배포</a:t>
+            </a:r>
+          </a:p>
+        </p:txBody>
+      </p:sp>
+      <p:sp>
+        <p:nvSpPr>
+          <p:cNvPr id="41" name="deckgen:wrap:footer"/>
           <p:cNvSpPr txBox="1"/>
           <p:nvPr/>
         </p:nvSpPr>
@@ -3211,7 +2932,7 @@
                 </a:solidFill>
                 <a:latin typeface="Pretendard"/>
               </a:rPr>
-              <a:t>© 2026 이애본(드림아이티비즈) · useful-ai.dreamitbiz.com · 교육 목적 비영리 이용 · 출처 표기</a:t>
+              <a:t>© 2026 이애본 · 홍문원(洪文院) 발행 · CC BY-NC-ND 4.0 · useful-ai.dreamitbiz.com</a:t>
             </a:r>
           </a:p>
         </p:txBody>
@@ -3516,7 +3237,7 @@
                 </a:solidFill>
                 <a:latin typeface="Pretendard"/>
               </a:rPr>
-              <a:t>3.  출처 표기 예: 이애본(드림아이티비즈), 「자료 제목」, useful-ai.dreamitbiz.com</a:t>
+              <a:t>3.  출처 표기 예: 이애본(드림아이티비즈), 「자료 제목」, 홍문원, useful-ai.dreamitbiz.com, CC BY-NC-ND 4.0</a:t>
             </a:r>
           </a:p>
           <a:p>
@@ -3593,7 +3314,7 @@
                 </a:solidFill>
                 <a:latin typeface="Pretendard"/>
               </a:rPr>
-              <a:t>© 2026 이애본(드림아이티비즈) · useful-ai.dreamitbiz.com · 교육 목적 비영리 이용 · 출처 표기</a:t>
+              <a:t>© 2026 이애본 · 홍문원(洪文院) 발행 · CC BY-NC-ND 4.0 · useful-ai.dreamitbiz.com</a:t>
             </a:r>
           </a:p>
         </p:txBody>
@@ -3821,7 +3542,7 @@
                 </a:solidFill>
                 <a:latin typeface="Pretendard"/>
               </a:rPr>
-              <a:t>저작권 · 이용 조건</a:t>
+              <a:t>저작권 · 이용 조건 (CC BY-NC-ND 4.0)</a:t>
             </a:r>
           </a:p>
         </p:txBody>
@@ -3860,7 +3581,7 @@
                 </a:solidFill>
                 <a:latin typeface="Pretendard"/>
               </a:rPr>
-              <a:t>1.  저작권 © 2026 이애본(드림아이티비즈 DreamIT Biz). 2026년 1월 「생성형 AI와 창의력·복합문제능력 향상 과정」 강의안을 공개용으로 다시 묶은 것입니다.</a:t>
+              <a:t>1.  저작권 © 2026 이애본(드림아이티비즈 DreamIT Biz). 발행 홍문원(洪文院, 출판사 신고번호 제2026-000026호). 2026년 1월 「생성형 AI와 창의력·복합문제능력 향상 과정」 강의안을 전자출판용으로 다시 묶은 것입니다. ISBN: 등록 후 기재.</a:t>
             </a:r>
           </a:p>
           <a:p>
@@ -3879,7 +3600,7 @@
                 </a:solidFill>
                 <a:latin typeface="Pretendard"/>
               </a:rPr>
-              <a:t>2.  교육 목적의 비영리 이용을 허용합니다 — 출처를 표기해 주세요.</a:t>
+              <a:t>2.  이 자료는 크리에이티브 커먼즈 저작자표시-비영리-변경금지 4.0 국제(CC BY-NC-ND 4.0) 라이선스를 따릅니다. creativecommons.org/licenses/by-nc-nd/4.0/deed.ko</a:t>
             </a:r>
           </a:p>
           <a:p>
@@ -3898,7 +3619,7 @@
                 </a:solidFill>
                 <a:latin typeface="Pretendard"/>
               </a:rPr>
-              <a:t>3.  재배포·판매·변형(내용 수정 후 배포)은 허용하지 않습니다. 필요하면 먼저 문의해 주세요.</a:t>
+              <a:t>3.  저작자 표시(BY): 출처를 밝히면 그대로 복사해 수업·강의·자습에 쓸 수 있습니다. 비영리(NC): 유료 강의·판매·광고 수익 목적에는 쓸 수 없습니다. 변경금지(ND): 내용을 고치거나 잘라 재조합해 배포할 수 없습니다.</a:t>
             </a:r>
           </a:p>
           <a:p>
@@ -3936,7 +3657,7 @@
                 </a:solidFill>
                 <a:latin typeface="Pretendard"/>
               </a:rPr>
-              <a:t>5.  문의 aebon@dreamitbiz.com · 카카오톡 ID aebon</a:t>
+              <a:t>5.  라이선스 범위 밖의 이용(영리·변형·2차 저작)은 먼저 문의해 주세요. aebon@dreamitbiz.com · 카카오톡 ID aebon</a:t>
             </a:r>
           </a:p>
         </p:txBody>
@@ -3975,7 +3696,7 @@
                 </a:solidFill>
                 <a:latin typeface="Pretendard"/>
               </a:rPr>
-              <a:t>© 2026 이애본(드림아이티비즈) · useful-ai.dreamitbiz.com · 교육 목적 비영리 이용 · 출처 표기</a:t>
+              <a:t>© 2026 이애본 · 홍문원(洪文院) 발행 · CC BY-NC-ND 4.0 · useful-ai.dreamitbiz.com</a:t>
             </a:r>
           </a:p>
         </p:txBody>
@@ -4299,7 +4020,7 @@
                 </a:solidFill>
                 <a:latin typeface="Pretendard"/>
               </a:rPr>
-              <a:t>© 2026 이애본(드림아이티비즈). 교육 목적 비영리 이용 · 출처 표기</a:t>
+              <a:t>© 2026 이애본 · 발행 홍문원(洪文院) · CC BY-NC-ND 4.0</a:t>
             </a:r>
           </a:p>
         </p:txBody>
@@ -4338,7 +4059,7 @@
                 </a:solidFill>
                 <a:latin typeface="Pretendard"/>
               </a:rPr>
-              <a:t>© 2026 이애본(드림아이티비즈) · useful-ai.dreamitbiz.com · 교육 목적 비영리 이용 · 출처 표기</a:t>
+              <a:t>© 2026 이애본 · 홍문원(洪文院) 발행 · CC BY-NC-ND 4.0 · useful-ai.dreamitbiz.com</a:t>
             </a:r>
           </a:p>
         </p:txBody>
@@ -4882,7 +4603,7 @@
                 </a:solidFill>
                 <a:latin typeface="Pretendard"/>
               </a:rPr>
-              <a:t>© 2026 이애본(드림아이티비즈) · useful-ai.dreamitbiz.com · 교육 목적 비영리 이용 · 출처 표기</a:t>
+              <a:t>© 2026 이애본 · 홍문원(洪文院) 발행 · CC BY-NC-ND 4.0 · useful-ai.dreamitbiz.com</a:t>
             </a:r>
           </a:p>
         </p:txBody>
@@ -5373,7 +5094,7 @@
                 </a:solidFill>
                 <a:latin typeface="Pretendard"/>
               </a:rPr>
-              <a:t>© 2026 이애본(드림아이티비즈) · useful-ai.dreamitbiz.com · 교육 목적 비영리 이용 · 출처 표기</a:t>
+              <a:t>© 2026 이애본 · 홍문원(洪文院) 발행 · CC BY-NC-ND 4.0 · useful-ai.dreamitbiz.com</a:t>
             </a:r>
           </a:p>
         </p:txBody>
@@ -6247,7 +5968,7 @@
         <p:spPr>
           <a:xfrm>
             <a:off x="865981" y="5617115"/>
-            <a:ext cx="1534363" cy="467258"/>
+            <a:ext cx="2700000" cy="467258"/>
           </a:xfrm>
           <a:prstGeom prst="rect">
             <a:avLst/>
@@ -6271,7 +5992,7 @@
                 <a:ea typeface="Manrope" pitchFamily="34" charset="-122"/>
                 <a:cs typeface="Manrope" pitchFamily="34" charset="-120"/>
               </a:rPr>
-              <a:t>Cmd + D</a:t>
+              <a:t>Cmd/Ctrl + D</a:t>
             </a:r>
             <a:endParaRPr lang="en-US" sz="2700" dirty="0"/>
           </a:p>
@@ -6324,8 +6045,8 @@
         </p:nvSpPr>
         <p:spPr>
           <a:xfrm>
-            <a:off x="4008774" y="5630874"/>
-            <a:ext cx="1535278" cy="467258"/>
+            <a:off x="2844052" y="5630874"/>
+            <a:ext cx="2700000" cy="467258"/>
           </a:xfrm>
           <a:prstGeom prst="rect">
             <a:avLst/>
@@ -6349,7 +6070,7 @@
                 <a:ea typeface="Manrope" pitchFamily="34" charset="-122"/>
                 <a:cs typeface="Manrope" pitchFamily="34" charset="-120"/>
               </a:rPr>
-              <a:t>Cmd + G</a:t>
+              <a:t>Cmd/Ctrl + G</a:t>
             </a:r>
             <a:endParaRPr lang="en-US" sz="2700" dirty="0"/>
           </a:p>
@@ -6528,7 +6249,7 @@
                 </a:solidFill>
                 <a:latin typeface="Pretendard"/>
               </a:rPr>
-              <a:t>© 2026 이애본(드림아이티비즈) · useful-ai.dreamitbiz.com · 교육 목적 비영리 이용 · 출처 표기</a:t>
+              <a:t>© 2026 이애본 · 홍문원(洪文院) 발행 · CC BY-NC-ND 4.0 · useful-ai.dreamitbiz.com</a:t>
             </a:r>
           </a:p>
         </p:txBody>
@@ -7253,7 +6974,7 @@
                 </a:solidFill>
                 <a:latin typeface="Pretendard"/>
               </a:rPr>
-              <a:t>© 2026 이애본(드림아이티비즈) · useful-ai.dreamitbiz.com · 교육 목적 비영리 이용 · 출처 표기</a:t>
+              <a:t>© 2026 이애본 · 홍문원(洪文院) 발행 · CC BY-NC-ND 4.0 · useful-ai.dreamitbiz.com</a:t>
             </a:r>
           </a:p>
         </p:txBody>
@@ -7864,7 +7585,7 @@
                 </a:solidFill>
                 <a:latin typeface="Pretendard"/>
               </a:rPr>
-              <a:t>© 2026 이애본(드림아이티비즈) · useful-ai.dreamitbiz.com · 교육 목적 비영리 이용 · 출처 표기</a:t>
+              <a:t>© 2026 이애본 · 홍문원(洪文院) 발행 · CC BY-NC-ND 4.0 · useful-ai.dreamitbiz.com</a:t>
             </a:r>
           </a:p>
         </p:txBody>
@@ -8368,7 +8089,43 @@
       </p:sp>
       <p:sp>
         <p:nvSpPr>
-          <p:cNvPr id="11" name="deckgen:wrap:footer"/>
+          <p:cNvPr id="11" name="S3 각주"/>
+          <p:cNvSpPr txBox="1"/>
+          <p:nvPr/>
+        </p:nvSpPr>
+        <p:spPr>
+          <a:xfrm>
+            <a:off x="500000" y="6560000"/>
+            <a:ext cx="11200000" cy="250000"/>
+          </a:xfrm>
+          <a:prstGeom prst="rect">
+            <a:avLst/>
+          </a:prstGeom>
+          <a:noFill/>
+        </p:spPr>
+        <p:txBody>
+          <a:bodyPr wrap="square" lIns="0" tIns="0" rIns="0" bIns="0" anchor="t">
+            <a:spAutoFit/>
+          </a:bodyPr>
+          <a:lstStyle/>
+          <a:p>
+            <a:r>
+              <a:rPr lang="ko-KR" sz="900" dirty="0">
+                <a:solidFill>
+                  <a:srgbClr val="6B7280"/>
+                </a:solidFill>
+                <a:latin typeface="Noto Sans KR"/>
+                <a:ea typeface="Noto Sans KR"/>
+                <a:cs typeface="Noto Sans KR"/>
+              </a:rPr>
+              <a:t>Figma AI 기능은 플랜별 월 AI 크레딧 안에서 쓴다(무료 Starter 월 500·하루 150). Make 사용 범위·요금은 figma.com/pricing 참조 — Figma 도움말 「How Figma AI credits work」(2026-10 확인)</a:t>
+            </a:r>
+          </a:p>
+        </p:txBody>
+      </p:sp>
+      <p:sp>
+        <p:nvSpPr>
+          <p:cNvPr id="12" name="deckgen:wrap:footer"/>
           <p:cNvSpPr txBox="1"/>
           <p:nvPr/>
         </p:nvSpPr>
@@ -8400,7 +8157,7 @@
                 </a:solidFill>
                 <a:latin typeface="Pretendard"/>
               </a:rPr>
-              <a:t>© 2026 이애본(드림아이티비즈) · useful-ai.dreamitbiz.com · 교육 목적 비영리 이용 · 출처 표기</a:t>
+              <a:t>© 2026 이애본 · 홍문원(洪文院) 발행 · CC BY-NC-ND 4.0 · useful-ai.dreamitbiz.com</a:t>
             </a:r>
           </a:p>
         </p:txBody>
@@ -8432,45 +8189,6 @@
       </p:grpSpPr>
       <p:sp>
         <p:nvSpPr>
-          <p:cNvPr id="3" name="Text 1"/>
-          <p:cNvSpPr txBox="1"/>
-          <p:nvPr/>
-        </p:nvSpPr>
-        <p:spPr>
-          <a:xfrm>
-            <a:off x="10533888" y="466344"/>
-            <a:ext cx="1324051" cy="228600"/>
-          </a:xfrm>
-          <a:prstGeom prst="rect">
-            <a:avLst/>
-          </a:prstGeom>
-          <a:noFill/>
-          <a:ln/>
-        </p:spPr>
-        <p:txBody>
-          <a:bodyPr wrap="square" lIns="0" tIns="0" rIns="0" bIns="0" rtlCol="0" anchor="ctr"/>
-          <a:lstStyle/>
-          <a:p>
-            <a:pPr marL="0" indent="0" algn="l">
-              <a:buNone/>
-            </a:pPr>
-            <a:r>
-              <a:rPr lang="en-US" sz="1300" b="1" dirty="0">
-                <a:solidFill>
-                  <a:srgbClr val="FF6908"/>
-                </a:solidFill>
-                <a:latin typeface="Manrope" pitchFamily="34" charset="0"/>
-                <a:ea typeface="Manrope" pitchFamily="34" charset="-122"/>
-                <a:cs typeface="Manrope" pitchFamily="34" charset="-120"/>
-              </a:rPr>
-              <a:t>JANUARY 2026</a:t>
-            </a:r>
-            <a:endParaRPr lang="en-US" sz="1300" dirty="0"/>
-          </a:p>
-        </p:txBody>
-      </p:sp>
-      <p:sp>
-        <p:nvSpPr>
           <p:cNvPr id="4" name="Text 2"/>
           <p:cNvSpPr txBox="1"/>
           <p:nvPr/>
@@ -8852,7 +8570,7 @@
                 <a:ea typeface="Noto Sans KR" pitchFamily="34" charset="-122"/>
                 <a:cs typeface="Noto Sans KR" pitchFamily="34" charset="-120"/>
               </a:rPr>
-              <a:t> 1. iPhone 14 프레임 생성 (이름: Vote_Screen)</a:t>
+              <a:t> 1. iPhone 프레임 생성 (이름: Vote_Screen)</a:t>
             </a:r>
             <a:endParaRPr lang="en-US" sz="1200" dirty="0"/>
           </a:p>
@@ -9306,7 +9024,7 @@
                 </a:solidFill>
                 <a:latin typeface="Pretendard"/>
               </a:rPr>
-              <a:t>© 2026 이애본(드림아이티비즈) · useful-ai.dreamitbiz.com · 교육 목적 비영리 이용 · 출처 표기</a:t>
+              <a:t>© 2026 이애본 · 홍문원(洪文院) 발행 · CC BY-NC-ND 4.0 · useful-ai.dreamitbiz.com</a:t>
             </a:r>
           </a:p>
         </p:txBody>
@@ -10409,7 +10127,7 @@
                 </a:solidFill>
                 <a:latin typeface="Pretendard"/>
               </a:rPr>
-              <a:t>© 2026 이애본(드림아이티비즈) · useful-ai.dreamitbiz.com · 교육 목적 비영리 이용 · 출처 표기</a:t>
+              <a:t>© 2026 이애본 · 홍문원(洪文院) 발행 · CC BY-NC-ND 4.0 · useful-ai.dreamitbiz.com</a:t>
             </a:r>
           </a:p>
         </p:txBody>

--- a/library/a06-figma-nocode/a06-figma-nocode.pptx
+++ b/library/a06-figma-nocode/a06-figma-nocode.pptx
@@ -9079,7 +9079,7 @@
               <a:buNone/>
             </a:pPr>
             <a:r>
-              <a:rPr lang="en-US" sz="7500" b="1" dirty="0">
+              <a:rPr lang="en-US" sz="6600" b="1" dirty="0">
                 <a:solidFill>
                   <a:srgbClr val="FF6908">
                     <a:alpha val="80000"/>
@@ -9393,7 +9393,7 @@
         <p:spPr>
           <a:xfrm>
             <a:off x="4722876" y="2128723"/>
-            <a:ext cx="990295" cy="276149"/>
+            <a:ext cx="1041400" cy="276149"/>
           </a:xfrm>
           <a:prstGeom prst="roundRect">
             <a:avLst>
@@ -9768,7 +9768,7 @@
         <p:spPr>
           <a:xfrm>
             <a:off x="4837176" y="2176272"/>
-            <a:ext cx="838505" cy="181051"/>
+            <a:ext cx="939800" cy="181051"/>
           </a:xfrm>
           <a:prstGeom prst="rect">
             <a:avLst/>

--- a/library/a06-figma-nocode/a06-figma-nocode.pptx
+++ b/library/a06-figma-nocode/a06-figma-nocode.pptx
@@ -3581,7 +3581,7 @@
                 </a:solidFill>
                 <a:latin typeface="Pretendard"/>
               </a:rPr>
-              <a:t>1.  저작권 © 2026 이애본(드림아이티비즈 DreamIT Biz). 발행 홍문원(洪文院, 출판사 신고번호 제2026-000026호). 2026년 1월 「생성형 AI와 창의력·복합문제능력 향상 과정」 강의안을 전자출판용으로 다시 묶은 것입니다. ISBN: 등록 후 기재.</a:t>
+              <a:t>1.  저작권 © 2026 이애본(드림아이티비즈 DreamIT Biz). 발행 홍문원(洪文院, 출판사 신고번호 제2026-000026호). 이애본이 2026년 대학·기관 강의 현장에서 쓴 강의안을 전자출판용으로 다시 묶은 것입니다. ISBN: 등록 후 기재.</a:t>
             </a:r>
           </a:p>
           <a:p>
